--- a/10-Knowledge-Products/KP2-GIF/videos/module_2/en/decks/KP2_M2_Deck_v0.1.pptx
+++ b/10-Knowledge-Products/KP2-GIF/videos/module_2/en/decks/KP2_M2_Deck_v0.1.pptx
@@ -15162,7 +15162,7 @@
                 </a:solidFill>
                 <a:latin typeface="Arial"/>
               </a:rPr>
-              <a:t>KP2 · MODULE 2 · VIDEO 2.2</a:t>
+              <a:t>MODULE 2 · VIDEO 2.2</a:t>
             </a:r>
           </a:p>
         </p:txBody>
@@ -17688,7 +17688,7 @@
                 </a:solidFill>
                 <a:latin typeface="Arial"/>
               </a:rPr>
-              <a:t>KP2 · MODULE 2 · VIDEO 2.3</a:t>
+              <a:t>MODULE 2 · VIDEO 2.3</a:t>
             </a:r>
           </a:p>
         </p:txBody>
@@ -20566,7 +20566,7 @@
                 </a:solidFill>
                 <a:latin typeface="Arial"/>
               </a:rPr>
-              <a:t>KP2 · MODULE 2 · VIDEO 2.4</a:t>
+              <a:t>MODULE 2 · VIDEO 2.4</a:t>
             </a:r>
           </a:p>
         </p:txBody>
@@ -22654,7 +22654,7 @@
                 </a:solidFill>
                 <a:latin typeface="Arial"/>
               </a:rPr>
-              <a:t>KP2 · MODULE 2 · VIDEO 2.1</a:t>
+              <a:t>MODULE 2 · VIDEO 2.1</a:t>
             </a:r>
           </a:p>
         </p:txBody>
@@ -23336,7 +23336,7 @@
                 </a:solidFill>
                 <a:latin typeface="Arial"/>
               </a:rPr>
-              <a:t>KP2 · MODULE 2 · VIDEO 2.5</a:t>
+              <a:t>MODULE 2 · VIDEO 2.5</a:t>
             </a:r>
           </a:p>
         </p:txBody>
@@ -25504,7 +25504,7 @@
                 </a:solidFill>
                 <a:latin typeface="Arial"/>
               </a:rPr>
-              <a:t>KP2 · MODULE 2 · VIDEO 2.6</a:t>
+              <a:t>MODULE 2 · VIDEO 2.6</a:t>
             </a:r>
           </a:p>
         </p:txBody>
